--- a/assets/outline.pptx
+++ b/assets/outline.pptx
@@ -6,6 +6,8 @@
   </p:sldMasterIdLst>
   <p:sldIdLst>
     <p:sldId id="256" r:id="rId2"/>
+    <p:sldId id="257" r:id="rId3"/>
+    <p:sldId id="258" r:id="rId4"/>
   </p:sldIdLst>
   <p:sldSz cx="12192000" cy="6858000"/>
   <p:notesSz cx="6858000" cy="9144000"/>
@@ -104,6 +106,11 @@
       </a:defRPr>
     </a:lvl9pPr>
   </p:defaultTextStyle>
+  <p:extLst>
+    <p:ext uri="{EFAFB233-063F-42B5-8137-9DF3F51BA10A}">
+      <p15:sldGuideLst xmlns:p15="http://schemas.microsoft.com/office/powerpoint/2012/main"/>
+    </p:ext>
+  </p:extLst>
 </p:presentation>
 </file>
 
@@ -4054,6 +4061,1272 @@
     <p:extLst>
       <p:ext uri="{BB962C8B-B14F-4D97-AF65-F5344CB8AC3E}">
         <p14:creationId xmlns:p14="http://schemas.microsoft.com/office/powerpoint/2010/main" val="511114917"/>
+      </p:ext>
+    </p:extLst>
+  </p:cSld>
+  <p:clrMapOvr>
+    <a:masterClrMapping/>
+  </p:clrMapOvr>
+</p:sld>
+</file>
+
+<file path=ppt/slides/slide2.xml><?xml version="1.0" encoding="utf-8"?>
+<p:sld xmlns:a="http://schemas.openxmlformats.org/drawingml/2006/main" xmlns:r="http://schemas.openxmlformats.org/officeDocument/2006/relationships" xmlns:p="http://schemas.openxmlformats.org/presentationml/2006/main">
+  <p:cSld>
+    <p:spTree>
+      <p:nvGrpSpPr>
+        <p:cNvPr id="1" name="">
+          <a:extLst>
+            <a:ext uri="{FF2B5EF4-FFF2-40B4-BE49-F238E27FC236}">
+              <a16:creationId xmlns:a16="http://schemas.microsoft.com/office/drawing/2014/main" id="{157D5603-1ACD-7384-DC63-F5674FD359A6}"/>
+            </a:ext>
+          </a:extLst>
+        </p:cNvPr>
+        <p:cNvGrpSpPr/>
+        <p:nvPr/>
+      </p:nvGrpSpPr>
+      <p:grpSpPr>
+        <a:xfrm>
+          <a:off x="0" y="0"/>
+          <a:ext cx="0" cy="0"/>
+          <a:chOff x="0" y="0"/>
+          <a:chExt cx="0" cy="0"/>
+        </a:xfrm>
+      </p:grpSpPr>
+      <p:sp>
+        <p:nvSpPr>
+          <p:cNvPr id="8" name="矩形 7">
+            <a:extLst>
+              <a:ext uri="{FF2B5EF4-FFF2-40B4-BE49-F238E27FC236}">
+                <a16:creationId xmlns:a16="http://schemas.microsoft.com/office/drawing/2014/main" id="{5E6254B3-846D-CD93-C4A5-DFB7298BAC33}"/>
+              </a:ext>
+            </a:extLst>
+          </p:cNvPr>
+          <p:cNvSpPr/>
+          <p:nvPr/>
+        </p:nvSpPr>
+        <p:spPr>
+          <a:xfrm>
+            <a:off x="3458191" y="1105468"/>
+            <a:ext cx="2438399" cy="416257"/>
+          </a:xfrm>
+          <a:prstGeom prst="rect">
+            <a:avLst/>
+          </a:prstGeom>
+          <a:noFill/>
+          <a:ln>
+            <a:solidFill>
+              <a:schemeClr val="tx1"/>
+            </a:solidFill>
+          </a:ln>
+        </p:spPr>
+        <p:style>
+          <a:lnRef idx="2">
+            <a:schemeClr val="accent1">
+              <a:shade val="15000"/>
+            </a:schemeClr>
+          </a:lnRef>
+          <a:fillRef idx="1">
+            <a:schemeClr val="accent1"/>
+          </a:fillRef>
+          <a:effectRef idx="0">
+            <a:schemeClr val="accent1"/>
+          </a:effectRef>
+          <a:fontRef idx="minor">
+            <a:schemeClr val="lt1"/>
+          </a:fontRef>
+        </p:style>
+        <p:txBody>
+          <a:bodyPr rtlCol="0" anchor="ctr"/>
+          <a:lstStyle/>
+          <a:p>
+            <a:pPr algn="ctr"/>
+            <a:r>
+              <a:rPr lang="en-US" altLang="zh-CN">
+                <a:solidFill>
+                  <a:schemeClr val="tx1"/>
+                </a:solidFill>
+              </a:rPr>
+              <a:t>AI</a:t>
+            </a:r>
+            <a:r>
+              <a:rPr lang="zh-CN" altLang="en-US">
+                <a:solidFill>
+                  <a:schemeClr val="tx1"/>
+                </a:solidFill>
+              </a:rPr>
+              <a:t>基础设施</a:t>
+            </a:r>
+          </a:p>
+        </p:txBody>
+      </p:sp>
+      <p:sp>
+        <p:nvSpPr>
+          <p:cNvPr id="9" name="矩形 8">
+            <a:extLst>
+              <a:ext uri="{FF2B5EF4-FFF2-40B4-BE49-F238E27FC236}">
+                <a16:creationId xmlns:a16="http://schemas.microsoft.com/office/drawing/2014/main" id="{4939AC54-2C15-2AB1-566C-DDE669B0425A}"/>
+              </a:ext>
+            </a:extLst>
+          </p:cNvPr>
+          <p:cNvSpPr/>
+          <p:nvPr/>
+        </p:nvSpPr>
+        <p:spPr>
+          <a:xfrm>
+            <a:off x="6270386" y="1105468"/>
+            <a:ext cx="2438399" cy="416257"/>
+          </a:xfrm>
+          <a:prstGeom prst="rect">
+            <a:avLst/>
+          </a:prstGeom>
+          <a:noFill/>
+          <a:ln>
+            <a:solidFill>
+              <a:schemeClr val="tx1"/>
+            </a:solidFill>
+          </a:ln>
+        </p:spPr>
+        <p:style>
+          <a:lnRef idx="2">
+            <a:schemeClr val="accent1">
+              <a:shade val="15000"/>
+            </a:schemeClr>
+          </a:lnRef>
+          <a:fillRef idx="1">
+            <a:schemeClr val="accent1"/>
+          </a:fillRef>
+          <a:effectRef idx="0">
+            <a:schemeClr val="accent1"/>
+          </a:effectRef>
+          <a:fontRef idx="minor">
+            <a:schemeClr val="lt1"/>
+          </a:fontRef>
+        </p:style>
+        <p:txBody>
+          <a:bodyPr rtlCol="0" anchor="ctr"/>
+          <a:lstStyle/>
+          <a:p>
+            <a:pPr algn="ctr"/>
+            <a:r>
+              <a:rPr lang="zh-CN" altLang="en-US">
+                <a:solidFill>
+                  <a:schemeClr val="tx1"/>
+                </a:solidFill>
+              </a:rPr>
+              <a:t>数据集供应商</a:t>
+            </a:r>
+          </a:p>
+        </p:txBody>
+      </p:sp>
+      <p:sp>
+        <p:nvSpPr>
+          <p:cNvPr id="10" name="矩形 9">
+            <a:extLst>
+              <a:ext uri="{FF2B5EF4-FFF2-40B4-BE49-F238E27FC236}">
+                <a16:creationId xmlns:a16="http://schemas.microsoft.com/office/drawing/2014/main" id="{41E3E58C-01DF-E9CF-5A8E-E775C6087D29}"/>
+              </a:ext>
+            </a:extLst>
+          </p:cNvPr>
+          <p:cNvSpPr/>
+          <p:nvPr/>
+        </p:nvSpPr>
+        <p:spPr>
+          <a:xfrm>
+            <a:off x="9082584" y="1105468"/>
+            <a:ext cx="2438399" cy="416257"/>
+          </a:xfrm>
+          <a:prstGeom prst="rect">
+            <a:avLst/>
+          </a:prstGeom>
+          <a:noFill/>
+          <a:ln>
+            <a:solidFill>
+              <a:schemeClr val="tx1"/>
+            </a:solidFill>
+          </a:ln>
+        </p:spPr>
+        <p:style>
+          <a:lnRef idx="2">
+            <a:schemeClr val="accent1">
+              <a:shade val="15000"/>
+            </a:schemeClr>
+          </a:lnRef>
+          <a:fillRef idx="1">
+            <a:schemeClr val="accent1"/>
+          </a:fillRef>
+          <a:effectRef idx="0">
+            <a:schemeClr val="accent1"/>
+          </a:effectRef>
+          <a:fontRef idx="minor">
+            <a:schemeClr val="lt1"/>
+          </a:fontRef>
+        </p:style>
+        <p:txBody>
+          <a:bodyPr rtlCol="0" anchor="ctr"/>
+          <a:lstStyle/>
+          <a:p>
+            <a:pPr algn="ctr"/>
+            <a:r>
+              <a:rPr lang="zh-CN" altLang="en-US">
+                <a:solidFill>
+                  <a:schemeClr val="tx1"/>
+                </a:solidFill>
+              </a:rPr>
+              <a:t>开发者生态</a:t>
+            </a:r>
+          </a:p>
+        </p:txBody>
+      </p:sp>
+      <p:sp>
+        <p:nvSpPr>
+          <p:cNvPr id="11" name="矩形 10">
+            <a:extLst>
+              <a:ext uri="{FF2B5EF4-FFF2-40B4-BE49-F238E27FC236}">
+                <a16:creationId xmlns:a16="http://schemas.microsoft.com/office/drawing/2014/main" id="{CC7AD9D6-59B3-E031-FA2D-B864B7AB6E92}"/>
+              </a:ext>
+            </a:extLst>
+          </p:cNvPr>
+          <p:cNvSpPr/>
+          <p:nvPr/>
+        </p:nvSpPr>
+        <p:spPr>
+          <a:xfrm>
+            <a:off x="645993" y="1105468"/>
+            <a:ext cx="2438399" cy="416257"/>
+          </a:xfrm>
+          <a:prstGeom prst="rect">
+            <a:avLst/>
+          </a:prstGeom>
+          <a:noFill/>
+          <a:ln>
+            <a:solidFill>
+              <a:schemeClr val="tx1"/>
+            </a:solidFill>
+          </a:ln>
+        </p:spPr>
+        <p:style>
+          <a:lnRef idx="2">
+            <a:schemeClr val="accent1">
+              <a:shade val="15000"/>
+            </a:schemeClr>
+          </a:lnRef>
+          <a:fillRef idx="1">
+            <a:schemeClr val="accent1"/>
+          </a:fillRef>
+          <a:effectRef idx="0">
+            <a:schemeClr val="accent1"/>
+          </a:effectRef>
+          <a:fontRef idx="minor">
+            <a:schemeClr val="lt1"/>
+          </a:fontRef>
+        </p:style>
+        <p:txBody>
+          <a:bodyPr rtlCol="0" anchor="ctr"/>
+          <a:lstStyle/>
+          <a:p>
+            <a:pPr algn="ctr"/>
+            <a:r>
+              <a:rPr lang="zh-CN" altLang="en-US">
+                <a:solidFill>
+                  <a:schemeClr val="tx1"/>
+                </a:solidFill>
+              </a:rPr>
+              <a:t>数据采集厂</a:t>
+            </a:r>
+          </a:p>
+        </p:txBody>
+      </p:sp>
+      <p:sp>
+        <p:nvSpPr>
+          <p:cNvPr id="12" name="文本框 11">
+            <a:extLst>
+              <a:ext uri="{FF2B5EF4-FFF2-40B4-BE49-F238E27FC236}">
+                <a16:creationId xmlns:a16="http://schemas.microsoft.com/office/drawing/2014/main" id="{43A5CC3B-C75A-0ABD-C64D-AC0524F45F54}"/>
+              </a:ext>
+            </a:extLst>
+          </p:cNvPr>
+          <p:cNvSpPr txBox="1"/>
+          <p:nvPr/>
+        </p:nvSpPr>
+        <p:spPr>
+          <a:xfrm>
+            <a:off x="5542002" y="204295"/>
+            <a:ext cx="646331" cy="369332"/>
+          </a:xfrm>
+          <a:prstGeom prst="rect">
+            <a:avLst/>
+          </a:prstGeom>
+          <a:noFill/>
+        </p:spPr>
+        <p:txBody>
+          <a:bodyPr wrap="none" rtlCol="0">
+            <a:spAutoFit/>
+          </a:bodyPr>
+          <a:lstStyle/>
+          <a:p>
+            <a:r>
+              <a:rPr lang="zh-CN" altLang="en-US"/>
+              <a:t>首图</a:t>
+            </a:r>
+          </a:p>
+        </p:txBody>
+      </p:sp>
+    </p:spTree>
+    <p:extLst>
+      <p:ext uri="{BB962C8B-B14F-4D97-AF65-F5344CB8AC3E}">
+        <p14:creationId xmlns:p14="http://schemas.microsoft.com/office/powerpoint/2010/main" val="1117879693"/>
+      </p:ext>
+    </p:extLst>
+  </p:cSld>
+  <p:clrMapOvr>
+    <a:masterClrMapping/>
+  </p:clrMapOvr>
+</p:sld>
+</file>
+
+<file path=ppt/slides/slide3.xml><?xml version="1.0" encoding="utf-8"?>
+<p:sld xmlns:a="http://schemas.openxmlformats.org/drawingml/2006/main" xmlns:r="http://schemas.openxmlformats.org/officeDocument/2006/relationships" xmlns:p="http://schemas.openxmlformats.org/presentationml/2006/main">
+  <p:cSld>
+    <p:spTree>
+      <p:nvGrpSpPr>
+        <p:cNvPr id="1" name="">
+          <a:extLst>
+            <a:ext uri="{FF2B5EF4-FFF2-40B4-BE49-F238E27FC236}">
+              <a16:creationId xmlns:a16="http://schemas.microsoft.com/office/drawing/2014/main" id="{5B44DEE1-3F62-58FA-47B2-E0C45F14CF7B}"/>
+            </a:ext>
+          </a:extLst>
+        </p:cNvPr>
+        <p:cNvGrpSpPr/>
+        <p:nvPr/>
+      </p:nvGrpSpPr>
+      <p:grpSpPr>
+        <a:xfrm>
+          <a:off x="0" y="0"/>
+          <a:ext cx="0" cy="0"/>
+          <a:chOff x="0" y="0"/>
+          <a:chExt cx="0" cy="0"/>
+        </a:xfrm>
+      </p:grpSpPr>
+      <p:sp>
+        <p:nvSpPr>
+          <p:cNvPr id="12" name="文本框 11">
+            <a:extLst>
+              <a:ext uri="{FF2B5EF4-FFF2-40B4-BE49-F238E27FC236}">
+                <a16:creationId xmlns:a16="http://schemas.microsoft.com/office/drawing/2014/main" id="{D609646F-06F4-2489-F2AD-5D9A81087DF8}"/>
+              </a:ext>
+            </a:extLst>
+          </p:cNvPr>
+          <p:cNvSpPr txBox="1"/>
+          <p:nvPr/>
+        </p:nvSpPr>
+        <p:spPr>
+          <a:xfrm>
+            <a:off x="5542002" y="204295"/>
+            <a:ext cx="1569660" cy="369332"/>
+          </a:xfrm>
+          <a:prstGeom prst="rect">
+            <a:avLst/>
+          </a:prstGeom>
+          <a:noFill/>
+        </p:spPr>
+        <p:txBody>
+          <a:bodyPr wrap="none" rtlCol="0">
+            <a:spAutoFit/>
+          </a:bodyPr>
+          <a:lstStyle/>
+          <a:p>
+            <a:r>
+              <a:rPr lang="zh-CN" altLang="en-US"/>
+              <a:t>数据资源需求</a:t>
+            </a:r>
+          </a:p>
+        </p:txBody>
+      </p:sp>
+      <p:graphicFrame>
+        <p:nvGraphicFramePr>
+          <p:cNvPr id="2" name="表格 1">
+            <a:extLst>
+              <a:ext uri="{FF2B5EF4-FFF2-40B4-BE49-F238E27FC236}">
+                <a16:creationId xmlns:a16="http://schemas.microsoft.com/office/drawing/2014/main" id="{60D11E0C-BFA6-9B2E-9BCD-AC9C2938A7BE}"/>
+              </a:ext>
+            </a:extLst>
+          </p:cNvPr>
+          <p:cNvGraphicFramePr>
+            <a:graphicFrameLocks noGrp="1"/>
+          </p:cNvGraphicFramePr>
+          <p:nvPr>
+            <p:extLst>
+              <p:ext uri="{D42A27DB-BD31-4B8C-83A1-F6EECF244321}">
+                <p14:modId xmlns:p14="http://schemas.microsoft.com/office/powerpoint/2010/main" val="3518247874"/>
+              </p:ext>
+            </p:extLst>
+          </p:nvPr>
+        </p:nvGraphicFramePr>
+        <p:xfrm>
+          <a:off x="369283" y="1287780"/>
+          <a:ext cx="11450851" cy="1854200"/>
+        </p:xfrm>
+        <a:graphic>
+          <a:graphicData uri="http://schemas.openxmlformats.org/drawingml/2006/table">
+            <a:tbl>
+              <a:tblPr firstRow="1" bandRow="1">
+                <a:tableStyleId>{5C22544A-7EE6-4342-B048-85BDC9FD1C3A}</a:tableStyleId>
+              </a:tblPr>
+              <a:tblGrid>
+                <a:gridCol w="1908475">
+                  <a:extLst>
+                    <a:ext uri="{9D8B030D-6E8A-4147-A177-3AD203B41FA5}">
+                      <a16:colId xmlns:a16="http://schemas.microsoft.com/office/drawing/2014/main" val="2547061485"/>
+                    </a:ext>
+                  </a:extLst>
+                </a:gridCol>
+                <a:gridCol w="1466447">
+                  <a:extLst>
+                    <a:ext uri="{9D8B030D-6E8A-4147-A177-3AD203B41FA5}">
+                      <a16:colId xmlns:a16="http://schemas.microsoft.com/office/drawing/2014/main" val="2511013265"/>
+                    </a:ext>
+                  </a:extLst>
+                </a:gridCol>
+                <a:gridCol w="1780295">
+                  <a:extLst>
+                    <a:ext uri="{9D8B030D-6E8A-4147-A177-3AD203B41FA5}">
+                      <a16:colId xmlns:a16="http://schemas.microsoft.com/office/drawing/2014/main" val="1841219463"/>
+                    </a:ext>
+                  </a:extLst>
+                </a:gridCol>
+                <a:gridCol w="2190750">
+                  <a:extLst>
+                    <a:ext uri="{9D8B030D-6E8A-4147-A177-3AD203B41FA5}">
+                      <a16:colId xmlns:a16="http://schemas.microsoft.com/office/drawing/2014/main" val="1975737003"/>
+                    </a:ext>
+                  </a:extLst>
+                </a:gridCol>
+                <a:gridCol w="1329431">
+                  <a:extLst>
+                    <a:ext uri="{9D8B030D-6E8A-4147-A177-3AD203B41FA5}">
+                      <a16:colId xmlns:a16="http://schemas.microsoft.com/office/drawing/2014/main" val="4253163370"/>
+                    </a:ext>
+                  </a:extLst>
+                </a:gridCol>
+                <a:gridCol w="2775453">
+                  <a:extLst>
+                    <a:ext uri="{9D8B030D-6E8A-4147-A177-3AD203B41FA5}">
+                      <a16:colId xmlns:a16="http://schemas.microsoft.com/office/drawing/2014/main" val="1623146902"/>
+                    </a:ext>
+                  </a:extLst>
+                </a:gridCol>
+              </a:tblGrid>
+              <a:tr h="370840">
+                <a:tc>
+                  <a:txBody>
+                    <a:bodyPr/>
+                    <a:lstStyle/>
+                    <a:p>
+                      <a:r>
+                        <a:rPr lang="zh-CN" altLang="en-US"/>
+                        <a:t>时间预估</a:t>
+                      </a:r>
+                    </a:p>
+                  </a:txBody>
+                  <a:tcPr/>
+                </a:tc>
+                <a:tc>
+                  <a:txBody>
+                    <a:bodyPr/>
+                    <a:lstStyle/>
+                    <a:p>
+                      <a:r>
+                        <a:rPr lang="zh-CN" altLang="en-US" b="1"/>
+                        <a:t>存储空间</a:t>
+                      </a:r>
+                    </a:p>
+                  </a:txBody>
+                  <a:tcPr/>
+                </a:tc>
+                <a:tc>
+                  <a:txBody>
+                    <a:bodyPr/>
+                    <a:lstStyle/>
+                    <a:p>
+                      <a:r>
+                        <a:rPr lang="en-US" altLang="zh-CN"/>
+                        <a:t>CPU</a:t>
+                      </a:r>
+                      <a:r>
+                        <a:rPr lang="zh-CN" altLang="en-US"/>
+                        <a:t>资源</a:t>
+                      </a:r>
+                    </a:p>
+                  </a:txBody>
+                  <a:tcPr/>
+                </a:tc>
+                <a:tc>
+                  <a:txBody>
+                    <a:bodyPr/>
+                    <a:lstStyle/>
+                    <a:p>
+                      <a:r>
+                        <a:rPr lang="zh-CN" altLang="en-US"/>
+                        <a:t>测试</a:t>
+                      </a:r>
+                      <a:r>
+                        <a:rPr lang="en-US" altLang="zh-CN"/>
+                        <a:t>/Rollout GPU</a:t>
+                      </a:r>
+                      <a:endParaRPr lang="zh-CN" altLang="en-US"/>
+                    </a:p>
+                  </a:txBody>
+                  <a:tcPr/>
+                </a:tc>
+                <a:tc>
+                  <a:txBody>
+                    <a:bodyPr/>
+                    <a:lstStyle/>
+                    <a:p>
+                      <a:r>
+                        <a:rPr lang="zh-CN" altLang="en-US"/>
+                        <a:t>带宽资源</a:t>
+                      </a:r>
+                    </a:p>
+                  </a:txBody>
+                  <a:tcPr/>
+                </a:tc>
+                <a:tc>
+                  <a:txBody>
+                    <a:bodyPr/>
+                    <a:lstStyle/>
+                    <a:p>
+                      <a:r>
+                        <a:rPr lang="zh-CN" altLang="en-US"/>
+                        <a:t>说明</a:t>
+                      </a:r>
+                    </a:p>
+                  </a:txBody>
+                  <a:tcPr/>
+                </a:tc>
+                <a:extLst>
+                  <a:ext uri="{0D108BD9-81ED-4DB2-BD59-A6C34878D82A}">
+                    <a16:rowId xmlns:a16="http://schemas.microsoft.com/office/drawing/2014/main" val="3448032614"/>
+                  </a:ext>
+                </a:extLst>
+              </a:tr>
+              <a:tr h="370840">
+                <a:tc>
+                  <a:txBody>
+                    <a:bodyPr/>
+                    <a:lstStyle/>
+                    <a:p>
+                      <a:r>
+                        <a:rPr lang="en-US" altLang="zh-CN"/>
+                        <a:t>2026</a:t>
+                      </a:r>
+                      <a:r>
+                        <a:rPr lang="zh-CN" altLang="en-US"/>
+                        <a:t>年</a:t>
+                      </a:r>
+                      <a:r>
+                        <a:rPr lang="en-US" altLang="zh-CN"/>
+                        <a:t>9</a:t>
+                      </a:r>
+                      <a:r>
+                        <a:rPr lang="zh-CN" altLang="en-US"/>
+                        <a:t>月第</a:t>
+                      </a:r>
+                    </a:p>
+                  </a:txBody>
+                  <a:tcPr/>
+                </a:tc>
+                <a:tc>
+                  <a:txBody>
+                    <a:bodyPr/>
+                    <a:lstStyle/>
+                    <a:p>
+                      <a:r>
+                        <a:rPr lang="en-US" altLang="zh-CN" b="1"/>
+                        <a:t>200~400TB</a:t>
+                      </a:r>
+                      <a:endParaRPr lang="zh-CN" altLang="en-US" b="1"/>
+                    </a:p>
+                  </a:txBody>
+                  <a:tcPr/>
+                </a:tc>
+                <a:tc>
+                  <a:txBody>
+                    <a:bodyPr/>
+                    <a:lstStyle/>
+                    <a:p>
+                      <a:r>
+                        <a:rPr lang="en-US" altLang="zh-CN"/>
+                        <a:t>64</a:t>
+                      </a:r>
+                      <a:r>
+                        <a:rPr lang="zh-CN" altLang="en-US"/>
+                        <a:t>核</a:t>
+                      </a:r>
+                      <a:r>
+                        <a:rPr lang="en-US" altLang="zh-CN"/>
+                        <a:t>*1</a:t>
+                      </a:r>
+                      <a:r>
+                        <a:rPr lang="zh-CN" altLang="en-US"/>
+                        <a:t>节点</a:t>
+                      </a:r>
+                    </a:p>
+                  </a:txBody>
+                  <a:tcPr/>
+                </a:tc>
+                <a:tc>
+                  <a:txBody>
+                    <a:bodyPr/>
+                    <a:lstStyle/>
+                    <a:p>
+                      <a:r>
+                        <a:rPr lang="en-US" altLang="zh-CN"/>
+                        <a:t>4*A100</a:t>
+                      </a:r>
+                      <a:endParaRPr lang="zh-CN" altLang="en-US"/>
+                    </a:p>
+                  </a:txBody>
+                  <a:tcPr/>
+                </a:tc>
+                <a:tc>
+                  <a:txBody>
+                    <a:bodyPr/>
+                    <a:lstStyle/>
+                    <a:p>
+                      <a:r>
+                        <a:rPr lang="en-US" altLang="zh-CN"/>
+                        <a:t>1 Gbps</a:t>
+                      </a:r>
+                      <a:endParaRPr lang="zh-CN" altLang="en-US"/>
+                    </a:p>
+                  </a:txBody>
+                  <a:tcPr/>
+                </a:tc>
+                <a:tc>
+                  <a:txBody>
+                    <a:bodyPr/>
+                    <a:lstStyle/>
+                    <a:p>
+                      <a:r>
+                        <a:rPr lang="en-US" altLang="zh-CN"/>
+                        <a:t>1</a:t>
+                      </a:r>
+                      <a:r>
+                        <a:rPr lang="zh-CN" altLang="en-US"/>
+                        <a:t>万小时（入门级）</a:t>
+                      </a:r>
+                    </a:p>
+                  </a:txBody>
+                  <a:tcPr/>
+                </a:tc>
+                <a:extLst>
+                  <a:ext uri="{0D108BD9-81ED-4DB2-BD59-A6C34878D82A}">
+                    <a16:rowId xmlns:a16="http://schemas.microsoft.com/office/drawing/2014/main" val="1294967143"/>
+                  </a:ext>
+                </a:extLst>
+              </a:tr>
+              <a:tr h="370840">
+                <a:tc>
+                  <a:txBody>
+                    <a:bodyPr/>
+                    <a:lstStyle/>
+                    <a:p>
+                      <a:r>
+                        <a:rPr lang="en-US" altLang="zh-CN"/>
+                        <a:t>2026</a:t>
+                      </a:r>
+                      <a:r>
+                        <a:rPr lang="zh-CN" altLang="en-US"/>
+                        <a:t>年</a:t>
+                      </a:r>
+                      <a:r>
+                        <a:rPr lang="en-US" altLang="zh-CN"/>
+                        <a:t>12</a:t>
+                      </a:r>
+                      <a:r>
+                        <a:rPr lang="zh-CN" altLang="en-US"/>
+                        <a:t>月底</a:t>
+                      </a:r>
+                    </a:p>
+                  </a:txBody>
+                  <a:tcPr/>
+                </a:tc>
+                <a:tc>
+                  <a:txBody>
+                    <a:bodyPr/>
+                    <a:lstStyle/>
+                    <a:p>
+                      <a:r>
+                        <a:rPr lang="en-US" altLang="zh-CN" b="1"/>
+                        <a:t>1~3PB</a:t>
+                      </a:r>
+                      <a:endParaRPr lang="zh-CN" altLang="en-US" b="1"/>
+                    </a:p>
+                  </a:txBody>
+                  <a:tcPr/>
+                </a:tc>
+                <a:tc>
+                  <a:txBody>
+                    <a:bodyPr/>
+                    <a:lstStyle/>
+                    <a:p>
+                      <a:pPr marL="0" marR="0" lvl="0" indent="0" algn="l" defTabSz="914400" rtl="0" eaLnBrk="1" fontAlgn="auto" latinLnBrk="0" hangingPunct="1">
+                        <a:lnSpc>
+                          <a:spcPct val="100000"/>
+                        </a:lnSpc>
+                        <a:spcBef>
+                          <a:spcPts val="0"/>
+                        </a:spcBef>
+                        <a:spcAft>
+                          <a:spcPts val="0"/>
+                        </a:spcAft>
+                        <a:buClrTx/>
+                        <a:buSzTx/>
+                        <a:buFontTx/>
+                        <a:buNone/>
+                        <a:tabLst/>
+                        <a:defRPr/>
+                      </a:pPr>
+                      <a:r>
+                        <a:rPr lang="en-US" altLang="zh-CN"/>
+                        <a:t>256</a:t>
+                      </a:r>
+                      <a:r>
+                        <a:rPr lang="zh-CN" altLang="en-US"/>
+                        <a:t>核</a:t>
+                      </a:r>
+                      <a:r>
+                        <a:rPr lang="en-US" altLang="zh-CN"/>
+                        <a:t>*4</a:t>
+                      </a:r>
+                      <a:r>
+                        <a:rPr lang="zh-CN" altLang="en-US"/>
+                        <a:t>节点</a:t>
+                      </a:r>
+                    </a:p>
+                  </a:txBody>
+                  <a:tcPr/>
+                </a:tc>
+                <a:tc>
+                  <a:txBody>
+                    <a:bodyPr/>
+                    <a:lstStyle/>
+                    <a:p>
+                      <a:r>
+                        <a:rPr lang="en-US" altLang="zh-CN"/>
+                        <a:t>16*A100</a:t>
+                      </a:r>
+                      <a:endParaRPr lang="zh-CN" altLang="en-US"/>
+                    </a:p>
+                  </a:txBody>
+                  <a:tcPr/>
+                </a:tc>
+                <a:tc>
+                  <a:txBody>
+                    <a:bodyPr/>
+                    <a:lstStyle/>
+                    <a:p>
+                      <a:r>
+                        <a:rPr lang="en-US" altLang="zh-CN"/>
+                        <a:t>10 Gbps</a:t>
+                      </a:r>
+                      <a:endParaRPr lang="zh-CN" altLang="en-US"/>
+                    </a:p>
+                  </a:txBody>
+                  <a:tcPr/>
+                </a:tc>
+                <a:tc>
+                  <a:txBody>
+                    <a:bodyPr/>
+                    <a:lstStyle/>
+                    <a:p>
+                      <a:pPr marL="0" marR="0" lvl="0" indent="0" algn="l" defTabSz="914400" rtl="0" eaLnBrk="1" fontAlgn="auto" latinLnBrk="0" hangingPunct="1">
+                        <a:lnSpc>
+                          <a:spcPct val="100000"/>
+                        </a:lnSpc>
+                        <a:spcBef>
+                          <a:spcPts val="0"/>
+                        </a:spcBef>
+                        <a:spcAft>
+                          <a:spcPts val="0"/>
+                        </a:spcAft>
+                        <a:buClrTx/>
+                        <a:buSzTx/>
+                        <a:buFontTx/>
+                        <a:buNone/>
+                        <a:tabLst/>
+                        <a:defRPr/>
+                      </a:pPr>
+                      <a:r>
+                        <a:rPr lang="en-US" altLang="zh-CN"/>
+                        <a:t>10</a:t>
+                      </a:r>
+                      <a:r>
+                        <a:rPr lang="zh-CN" altLang="en-US"/>
+                        <a:t>万小时（企业级）</a:t>
+                      </a:r>
+                    </a:p>
+                  </a:txBody>
+                  <a:tcPr/>
+                </a:tc>
+                <a:extLst>
+                  <a:ext uri="{0D108BD9-81ED-4DB2-BD59-A6C34878D82A}">
+                    <a16:rowId xmlns:a16="http://schemas.microsoft.com/office/drawing/2014/main" val="2357101135"/>
+                  </a:ext>
+                </a:extLst>
+              </a:tr>
+              <a:tr h="370840">
+                <a:tc>
+                  <a:txBody>
+                    <a:bodyPr/>
+                    <a:lstStyle/>
+                    <a:p>
+                      <a:r>
+                        <a:rPr lang="en-US" altLang="zh-CN"/>
+                        <a:t>2027</a:t>
+                      </a:r>
+                      <a:r>
+                        <a:rPr lang="zh-CN" altLang="en-US"/>
+                        <a:t>年</a:t>
+                      </a:r>
+                      <a:r>
+                        <a:rPr lang="en-US" altLang="zh-CN"/>
+                        <a:t>6</a:t>
+                      </a:r>
+                      <a:r>
+                        <a:rPr lang="zh-CN" altLang="en-US"/>
+                        <a:t>月底</a:t>
+                      </a:r>
+                    </a:p>
+                  </a:txBody>
+                  <a:tcPr/>
+                </a:tc>
+                <a:tc>
+                  <a:txBody>
+                    <a:bodyPr/>
+                    <a:lstStyle/>
+                    <a:p>
+                      <a:pPr marL="0" marR="0" lvl="0" indent="0" algn="l" defTabSz="914400" rtl="0" eaLnBrk="1" fontAlgn="auto" latinLnBrk="0" hangingPunct="1">
+                        <a:lnSpc>
+                          <a:spcPct val="100000"/>
+                        </a:lnSpc>
+                        <a:spcBef>
+                          <a:spcPts val="0"/>
+                        </a:spcBef>
+                        <a:spcAft>
+                          <a:spcPts val="0"/>
+                        </a:spcAft>
+                        <a:buClrTx/>
+                        <a:buSzTx/>
+                        <a:buFontTx/>
+                        <a:buNone/>
+                        <a:tabLst/>
+                        <a:defRPr/>
+                      </a:pPr>
+                      <a:r>
+                        <a:rPr lang="en-US" altLang="zh-CN" b="1"/>
+                        <a:t>5~15PB</a:t>
+                      </a:r>
+                      <a:endParaRPr lang="zh-CN" altLang="en-US" b="1"/>
+                    </a:p>
+                  </a:txBody>
+                  <a:tcPr/>
+                </a:tc>
+                <a:tc>
+                  <a:txBody>
+                    <a:bodyPr/>
+                    <a:lstStyle/>
+                    <a:p>
+                      <a:r>
+                        <a:rPr lang="en-US" altLang="zh-CN"/>
+                        <a:t>256</a:t>
+                      </a:r>
+                      <a:r>
+                        <a:rPr lang="zh-CN" altLang="en-US"/>
+                        <a:t>核</a:t>
+                      </a:r>
+                      <a:r>
+                        <a:rPr lang="en-US" altLang="zh-CN"/>
+                        <a:t>*32</a:t>
+                      </a:r>
+                      <a:r>
+                        <a:rPr lang="zh-CN" altLang="en-US"/>
+                        <a:t>节点</a:t>
+                      </a:r>
+                    </a:p>
+                  </a:txBody>
+                  <a:tcPr/>
+                </a:tc>
+                <a:tc>
+                  <a:txBody>
+                    <a:bodyPr/>
+                    <a:lstStyle/>
+                    <a:p>
+                      <a:r>
+                        <a:rPr lang="en-US" altLang="zh-CN"/>
+                        <a:t>64*H100</a:t>
+                      </a:r>
+                      <a:endParaRPr lang="zh-CN" altLang="en-US"/>
+                    </a:p>
+                  </a:txBody>
+                  <a:tcPr/>
+                </a:tc>
+                <a:tc>
+                  <a:txBody>
+                    <a:bodyPr/>
+                    <a:lstStyle/>
+                    <a:p>
+                      <a:r>
+                        <a:rPr lang="en-US" altLang="zh-CN"/>
+                        <a:t>25 Gbps</a:t>
+                      </a:r>
+                      <a:endParaRPr lang="zh-CN" altLang="en-US"/>
+                    </a:p>
+                  </a:txBody>
+                  <a:tcPr/>
+                </a:tc>
+                <a:tc>
+                  <a:txBody>
+                    <a:bodyPr/>
+                    <a:lstStyle/>
+                    <a:p>
+                      <a:pPr marL="0" marR="0" lvl="0" indent="0" algn="l" defTabSz="914400" rtl="0" eaLnBrk="1" fontAlgn="auto" latinLnBrk="0" hangingPunct="1">
+                        <a:lnSpc>
+                          <a:spcPct val="100000"/>
+                        </a:lnSpc>
+                        <a:spcBef>
+                          <a:spcPts val="0"/>
+                        </a:spcBef>
+                        <a:spcAft>
+                          <a:spcPts val="0"/>
+                        </a:spcAft>
+                        <a:buClrTx/>
+                        <a:buSzTx/>
+                        <a:buFontTx/>
+                        <a:buNone/>
+                        <a:tabLst/>
+                        <a:defRPr/>
+                      </a:pPr>
+                      <a:r>
+                        <a:rPr lang="en-US" altLang="zh-CN"/>
+                        <a:t>50</a:t>
+                      </a:r>
+                      <a:r>
+                        <a:rPr lang="zh-CN" altLang="en-US"/>
+                        <a:t>万小时（行业基础设施）</a:t>
+                      </a:r>
+                    </a:p>
+                  </a:txBody>
+                  <a:tcPr/>
+                </a:tc>
+                <a:extLst>
+                  <a:ext uri="{0D108BD9-81ED-4DB2-BD59-A6C34878D82A}">
+                    <a16:rowId xmlns:a16="http://schemas.microsoft.com/office/drawing/2014/main" val="2221572487"/>
+                  </a:ext>
+                </a:extLst>
+              </a:tr>
+              <a:tr h="370840">
+                <a:tc>
+                  <a:txBody>
+                    <a:bodyPr/>
+                    <a:lstStyle/>
+                    <a:p>
+                      <a:r>
+                        <a:rPr lang="en-US" altLang="zh-CN"/>
+                        <a:t>2027</a:t>
+                      </a:r>
+                      <a:r>
+                        <a:rPr lang="zh-CN" altLang="en-US"/>
+                        <a:t>年</a:t>
+                      </a:r>
+                      <a:r>
+                        <a:rPr lang="en-US" altLang="zh-CN"/>
+                        <a:t>12</a:t>
+                      </a:r>
+                      <a:r>
+                        <a:rPr lang="zh-CN" altLang="en-US"/>
+                        <a:t>月底</a:t>
+                      </a:r>
+                    </a:p>
+                  </a:txBody>
+                  <a:tcPr/>
+                </a:tc>
+                <a:tc>
+                  <a:txBody>
+                    <a:bodyPr/>
+                    <a:lstStyle/>
+                    <a:p>
+                      <a:pPr marL="0" marR="0" lvl="0" indent="0" algn="l" defTabSz="914400" rtl="0" eaLnBrk="1" fontAlgn="auto" latinLnBrk="0" hangingPunct="1">
+                        <a:lnSpc>
+                          <a:spcPct val="100000"/>
+                        </a:lnSpc>
+                        <a:spcBef>
+                          <a:spcPts val="0"/>
+                        </a:spcBef>
+                        <a:spcAft>
+                          <a:spcPts val="0"/>
+                        </a:spcAft>
+                        <a:buClrTx/>
+                        <a:buSzTx/>
+                        <a:buFontTx/>
+                        <a:buNone/>
+                        <a:tabLst/>
+                        <a:defRPr/>
+                      </a:pPr>
+                      <a:r>
+                        <a:rPr lang="en-US" altLang="zh-CN" b="1"/>
+                        <a:t>10~50PB</a:t>
+                      </a:r>
+                      <a:endParaRPr lang="zh-CN" altLang="en-US" b="1"/>
+                    </a:p>
+                  </a:txBody>
+                  <a:tcPr/>
+                </a:tc>
+                <a:tc>
+                  <a:txBody>
+                    <a:bodyPr/>
+                    <a:lstStyle/>
+                    <a:p>
+                      <a:r>
+                        <a:rPr lang="en-US" altLang="zh-CN"/>
+                        <a:t>256</a:t>
+                      </a:r>
+                      <a:r>
+                        <a:rPr lang="zh-CN" altLang="en-US"/>
+                        <a:t>核</a:t>
+                      </a:r>
+                      <a:r>
+                        <a:rPr lang="en-US" altLang="zh-CN"/>
+                        <a:t>*128</a:t>
+                      </a:r>
+                      <a:r>
+                        <a:rPr lang="zh-CN" altLang="en-US"/>
+                        <a:t>节点</a:t>
+                      </a:r>
+                    </a:p>
+                  </a:txBody>
+                  <a:tcPr/>
+                </a:tc>
+                <a:tc>
+                  <a:txBody>
+                    <a:bodyPr/>
+                    <a:lstStyle/>
+                    <a:p>
+                      <a:r>
+                        <a:rPr lang="en-US" altLang="zh-CN"/>
+                        <a:t>256*H100</a:t>
+                      </a:r>
+                      <a:endParaRPr lang="zh-CN" altLang="en-US"/>
+                    </a:p>
+                  </a:txBody>
+                  <a:tcPr/>
+                </a:tc>
+                <a:tc>
+                  <a:txBody>
+                    <a:bodyPr/>
+                    <a:lstStyle/>
+                    <a:p>
+                      <a:r>
+                        <a:rPr lang="en-US" altLang="zh-CN"/>
+                        <a:t>80 Gbps</a:t>
+                      </a:r>
+                      <a:endParaRPr lang="zh-CN" altLang="en-US"/>
+                    </a:p>
+                  </a:txBody>
+                  <a:tcPr/>
+                </a:tc>
+                <a:tc>
+                  <a:txBody>
+                    <a:bodyPr/>
+                    <a:lstStyle/>
+                    <a:p>
+                      <a:pPr marL="0" marR="0" lvl="0" indent="0" algn="l" defTabSz="914400" rtl="0" eaLnBrk="1" fontAlgn="auto" latinLnBrk="0" hangingPunct="1">
+                        <a:lnSpc>
+                          <a:spcPct val="100000"/>
+                        </a:lnSpc>
+                        <a:spcBef>
+                          <a:spcPts val="0"/>
+                        </a:spcBef>
+                        <a:spcAft>
+                          <a:spcPts val="0"/>
+                        </a:spcAft>
+                        <a:buClrTx/>
+                        <a:buSzTx/>
+                        <a:buFontTx/>
+                        <a:buNone/>
+                        <a:tabLst/>
+                        <a:defRPr/>
+                      </a:pPr>
+                      <a:r>
+                        <a:rPr lang="en-US" altLang="zh-CN"/>
+                        <a:t>100</a:t>
+                      </a:r>
+                      <a:r>
+                        <a:rPr lang="zh-CN" altLang="en-US"/>
+                        <a:t>万小时（国家级）</a:t>
+                      </a:r>
+                    </a:p>
+                  </a:txBody>
+                  <a:tcPr/>
+                </a:tc>
+                <a:extLst>
+                  <a:ext uri="{0D108BD9-81ED-4DB2-BD59-A6C34878D82A}">
+                    <a16:rowId xmlns:a16="http://schemas.microsoft.com/office/drawing/2014/main" val="2764323208"/>
+                  </a:ext>
+                </a:extLst>
+              </a:tr>
+            </a:tbl>
+          </a:graphicData>
+        </a:graphic>
+      </p:graphicFrame>
+      <p:sp>
+        <p:nvSpPr>
+          <p:cNvPr id="3" name="文本框 2">
+            <a:extLst>
+              <a:ext uri="{FF2B5EF4-FFF2-40B4-BE49-F238E27FC236}">
+                <a16:creationId xmlns:a16="http://schemas.microsoft.com/office/drawing/2014/main" id="{D43792CF-FCAC-524B-D2AB-366D8F4B353F}"/>
+              </a:ext>
+            </a:extLst>
+          </p:cNvPr>
+          <p:cNvSpPr txBox="1"/>
+          <p:nvPr/>
+        </p:nvSpPr>
+        <p:spPr>
+          <a:xfrm>
+            <a:off x="307547" y="3346689"/>
+            <a:ext cx="10190610" cy="1296637"/>
+          </a:xfrm>
+          <a:prstGeom prst="rect">
+            <a:avLst/>
+          </a:prstGeom>
+          <a:noFill/>
+        </p:spPr>
+        <p:txBody>
+          <a:bodyPr wrap="none" rtlCol="0">
+            <a:spAutoFit/>
+          </a:bodyPr>
+          <a:lstStyle/>
+          <a:p>
+            <a:pPr lvl="0">
+              <a:lnSpc>
+                <a:spcPct val="150000"/>
+              </a:lnSpc>
+              <a:defRPr/>
+            </a:pPr>
+            <a:r>
+              <a:rPr lang="zh-CN" altLang="en-US" b="1"/>
+              <a:t>测算：</a:t>
+            </a:r>
+            <a:r>
+              <a:rPr lang="en-US" altLang="zh-CN"/>
+              <a:t>1</a:t>
+            </a:r>
+            <a:r>
+              <a:rPr lang="zh-CN" altLang="en-US"/>
+              <a:t>万小时</a:t>
+            </a:r>
+            <a:r>
+              <a:rPr lang="en-US" altLang="zh-CN"/>
+              <a:t>100~300TB</a:t>
+            </a:r>
+            <a:r>
+              <a:rPr lang="zh-CN" altLang="en-US"/>
+              <a:t>，</a:t>
+            </a:r>
+            <a:r>
+              <a:rPr lang="en-US" altLang="zh-CN"/>
+              <a:t>1</a:t>
+            </a:r>
+            <a:r>
+              <a:rPr lang="zh-CN" altLang="en-US"/>
+              <a:t>万小时</a:t>
+            </a:r>
+            <a:r>
+              <a:rPr lang="en-US" altLang="zh-CN"/>
+              <a:t>50~250</a:t>
+            </a:r>
+            <a:r>
+              <a:rPr lang="zh-CN" altLang="en-US"/>
+              <a:t>万条数据，全球开源真机数据约有</a:t>
+            </a:r>
+            <a:r>
+              <a:rPr lang="en-US" altLang="zh-CN"/>
+              <a:t>7,500 </a:t>
+            </a:r>
+            <a:r>
+              <a:rPr lang="zh-CN" altLang="en-US"/>
+              <a:t>小时 ≈ </a:t>
+            </a:r>
+            <a:r>
+              <a:rPr lang="en-US" altLang="zh-CN"/>
+              <a:t>170 TB</a:t>
+            </a:r>
+          </a:p>
+          <a:p>
+            <a:pPr lvl="0">
+              <a:lnSpc>
+                <a:spcPct val="150000"/>
+              </a:lnSpc>
+              <a:defRPr/>
+            </a:pPr>
+            <a:r>
+              <a:rPr lang="en-US" altLang="zh-CN" b="1"/>
+              <a:t>CPU</a:t>
+            </a:r>
+            <a:r>
+              <a:rPr lang="zh-CN" altLang="en-US" b="1"/>
+              <a:t>资源：</a:t>
+            </a:r>
+            <a:r>
+              <a:rPr lang="zh-CN" altLang="en-US"/>
+              <a:t>用于预处理、分发和测试</a:t>
+            </a:r>
+            <a:r>
+              <a:rPr lang="en-US" altLang="zh-CN"/>
+              <a:t>Dataloader</a:t>
+            </a:r>
+          </a:p>
+          <a:p>
+            <a:pPr lvl="0">
+              <a:lnSpc>
+                <a:spcPct val="150000"/>
+              </a:lnSpc>
+              <a:defRPr/>
+            </a:pPr>
+            <a:r>
+              <a:rPr lang="en-US" altLang="zh-CN" b="1"/>
+              <a:t>GPU</a:t>
+            </a:r>
+            <a:r>
+              <a:rPr lang="zh-CN" altLang="en-US" b="1"/>
+              <a:t>资源：</a:t>
+            </a:r>
+            <a:r>
+              <a:rPr lang="zh-CN" altLang="en-US"/>
+              <a:t>用于基础</a:t>
+            </a:r>
+            <a:r>
+              <a:rPr lang="en-US" altLang="zh-CN"/>
+              <a:t>Rollout</a:t>
+            </a:r>
+            <a:r>
+              <a:rPr lang="zh-CN" altLang="en-US"/>
+              <a:t>测试，如需支撑训练需</a:t>
+            </a:r>
+            <a:r>
+              <a:rPr lang="en-US" altLang="zh-CN"/>
+              <a:t>*12</a:t>
+            </a:r>
+            <a:endParaRPr lang="zh-CN" altLang="en-US"/>
+          </a:p>
+        </p:txBody>
+      </p:sp>
+    </p:spTree>
+    <p:extLst>
+      <p:ext uri="{BB962C8B-B14F-4D97-AF65-F5344CB8AC3E}">
+        <p14:creationId xmlns:p14="http://schemas.microsoft.com/office/powerpoint/2010/main" val="287055918"/>
       </p:ext>
     </p:extLst>
   </p:cSld>
